--- a/storage/previews/seongdong_updated_20260910.pptx
+++ b/storage/previews/seongdong_updated_20260910.pptx
@@ -22379,7 +22379,7 @@
           </a:p>
           <a:p xmlns:a="http://schemas.openxmlformats.org/drawingml/2006/main">
             <a:r>
-              <a:t>    "expected_effect": "운영 목표 가정: 외지인 관광객의 지역 내 소비액이 10% 증가하거나, 지역상품권 사용액이 5% 증가하는 것을 목표로 함. (ML 전망은 탐색적이며 사업 효과를 확정하지 않음)",</a:t>
+              <a:t>    "expected_effect": "계획 목표: 최종월 ML 기준 전망 대비 방문 +20%, 소비 +20%. 월별 목표는 단계 적용하며 참여·이용 실적은 별도 집계합니다.",</a:t>
             </a:r>
           </a:p>
           <a:p xmlns:a="http://schemas.openxmlformats.org/drawingml/2006/main">
@@ -23014,7 +23014,7 @@
           </a:p>
           <a:p xmlns:a="http://schemas.openxmlformats.org/drawingml/2006/main">
             <a:r>
-              <a:t>    "expected_effect": "운영 목표 가정: 외지인 관광객의 지역 내 소비액이 10% 증가하거나, 지역상품권 사용액이 5% 증가하는 것을 목표로 함. (ML 전망은 탐색적이며 사업 효과를 확정하지 않음)",</a:t>
+              <a:t>    "expected_effect": "계획 목표: 최종월 ML 기준 전망 대비 방문 +20%, 소비 +20%. 월별 목표는 단계 적용하며 참여·이용 실적은 별도 집계합니다.",</a:t>
             </a:r>
           </a:p>
           <a:p xmlns:a="http://schemas.openxmlformats.org/drawingml/2006/main">
@@ -36919,7 +36919,7 @@
           <a:lstStyle/>
           <a:p>
             <a:r>
-              <a:t>강진군의회 2024-11-20 시정연설: 10월 말 관광객 약 248만 명, 전년 대비 25% 증가. 전년 규모 역산: 248만÷1.25≈198.4만 명, 차이≈49.6만 명. 역산값은 별도 관측 원자료가 아니다. 반값여행과 축제의 동시기 실적이며 사업 단독 효과·ML 대비 증가율은 아니다. 서울특별시 성동구은 최종월 방문 +20%를 도전 목표로 제안한다(25% × 80%). 80%는 전면 적용 대신 단계 운영을 고려한 계획 가정이며 인구 보정·통계 추정 계수가 아니다. 기본 소비 목표는 월별 소비/방문 비율을 추가 방문 수에 적용한 계획 가정이며 강진 소비 실적으로 계산한 값이 아니다. 현재 조정된 목표는 방문 +20%, 소비 +20%이다. 방문 수가 0보다 큰 월은 ML 소비액÷ML 방문 수를 추가 방문 수에 곱한다. 같은 월의 두 증가율은 같으며, 이 비율은 실제 1인당 소비액이 아니다.</a:t>
+              <a:t>강진군의회 2024-11-20 시정연설: 10월 말 관광객 약 248만 명, 전년 대비 25% 증가. 전년 규모 역산: 248만÷1.25≈198.4만 명, 차이≈49.6만 명. 역산값은 별도 관측 원자료가 아니다. 반값여행과 축제의 동시기 실적이며 사업 단독 효과·ML 대비 증가율은 아니다. 서울특별시 성동구에서는 최종월 방문 +20%를 도전 목표로 제안한다(25% × 80%). 80%는 전면 적용 대신 단계 운영을 고려한 계획 가정이며 인구 보정·통계 추정 계수가 아니다. 기본 소비 목표는 월별 소비/방문 비율을 추가 방문 수에 적용한 계획 가정이며 강진 소비 실적으로 계산한 값이 아니다. 방문 수가 0보다 큰 월은 ML 소비액÷ML 방문 수를 추가 방문 수에 곱한다. 같은 월의 두 증가율은 같으며, 이 비율은 실제 1인당 소비액이 아니다.</a:t>
             </a:r>
           </a:p>
           <a:p>
@@ -39314,7 +39314,7 @@
         <p:spPr>
           <a:xfrm>
             <a:off x="1009650" y="6067425"/>
-            <a:ext cx="13220700" cy="1666875"/>
+            <a:ext cx="12839700" cy="1666875"/>
           </a:xfrm>
           <a:prstGeom prst="rect">
             <a:avLst/>
@@ -39329,7 +39329,7 @@
           <a:p>
             <a:pPr eaLnBrk="0">
               <a:lnSpc>
-                <a:spcPts val="1968"/>
+                <a:spcPts val="2156"/>
               </a:lnSpc>
               <a:spcBef>
                 <a:spcPts val="0"/>
@@ -39339,19 +39339,19 @@
               </a:spcAft>
             </a:pPr>
             <a:r>
-              <a:rPr sz="1575" b="0">
+              <a:rPr sz="1725" b="0">
                 <a:solidFill>
                   <a:srgbClr val="59636E"/>
                 </a:solidFill>
                 <a:latin typeface="Noto Sans KR"/>
               </a:rPr>
-              <a:t>강진군의회 2024-11-20 시정연설: 10월 말 관광객 약 248만 명, 전년 대비 25% 증가. 전년 규모 역산: 248만÷1.25≈198.4만 명, 차이≈49.6만 명. 역산값은 별도</a:t>
+              <a:t>① 참고 실적: 강진 2024년 10월 누적 248만 명, 전년 대비 25% 증가. 반값여행·축제가 함께 운영된 지역 전체 실적.</a:t>
             </a:r>
           </a:p>
           <a:p>
             <a:pPr eaLnBrk="0">
               <a:lnSpc>
-                <a:spcPts val="1968"/>
+                <a:spcPts val="2156"/>
               </a:lnSpc>
               <a:spcBef>
                 <a:spcPts val="0"/>
@@ -39361,19 +39361,19 @@
               </a:spcAft>
             </a:pPr>
             <a:r>
-              <a:rPr sz="1575" b="0">
+              <a:rPr sz="1725" b="0">
                 <a:solidFill>
                   <a:srgbClr val="59636E"/>
                 </a:solidFill>
                 <a:latin typeface="Noto Sans KR"/>
               </a:rPr>
-              <a:t>관측 원자료가 아니다. 반값여행과 축제의 동시기 실적이며 사업 단독 효과·ML 대비 증가율은 아니다. 서울특별시 성동구은 최종월 방문 +20%를 도전 목표로</a:t>
+              <a:t>② 목표 채택: 25% × 80% = 20%. 80%는 단계 운영을 고려한 계획 가정이며 인구·통계 보정값은 아님.</a:t>
             </a:r>
           </a:p>
           <a:p>
             <a:pPr eaLnBrk="0">
               <a:lnSpc>
-                <a:spcPts val="1968"/>
+                <a:spcPts val="2156"/>
               </a:lnSpc>
               <a:spcBef>
                 <a:spcPts val="0"/>
@@ -39383,19 +39383,19 @@
               </a:spcAft>
             </a:pPr>
             <a:r>
-              <a:rPr sz="1575" b="0">
+              <a:rPr sz="1725" b="0">
                 <a:solidFill>
                   <a:srgbClr val="59636E"/>
                 </a:solidFill>
                 <a:latin typeface="Noto Sans KR"/>
               </a:rPr>
-              <a:t>제안한다(25% × 80%). 80%는 전면 적용 대신 단계 운영을 고려한 계획 가정이며 인구 보정·통계 추정 계수가 아니다. 기본 소비 목표는 월별 소비/방문 비율을</a:t>
+              <a:t>③ 적용 목표: 최종월 방문 +20% · 소비 +20%. 월별 기준 전망에 단계 적용.</a:t>
             </a:r>
           </a:p>
           <a:p>
             <a:pPr eaLnBrk="0">
               <a:lnSpc>
-                <a:spcPts val="1968"/>
+                <a:spcPts val="2156"/>
               </a:lnSpc>
               <a:spcBef>
                 <a:spcPts val="0"/>
@@ -39405,35 +39405,13 @@
               </a:spcAft>
             </a:pPr>
             <a:r>
-              <a:rPr sz="1575" b="0">
+              <a:rPr sz="1725" b="0">
                 <a:solidFill>
                   <a:srgbClr val="59636E"/>
                 </a:solidFill>
                 <a:latin typeface="Noto Sans KR"/>
               </a:rPr>
-              <a:t>추가 방문 수에 적용한 계획 가정이며 강진 소비 실적으로 계산한 값이 아니다. 현재 조정된 목표는 방문 +20%, 소비 +20%이다. 방문 수가 0보다 큰 월은 ML</a:t>
-            </a:r>
-          </a:p>
-          <a:p>
-            <a:pPr eaLnBrk="0">
-              <a:lnSpc>
-                <a:spcPts val="1968"/>
-              </a:lnSpc>
-              <a:spcBef>
-                <a:spcPts val="0"/>
-              </a:spcBef>
-              <a:spcAft>
-                <a:spcPts val="0"/>
-              </a:spcAft>
-            </a:pPr>
-            <a:r>
-              <a:rPr sz="1575" b="0">
-                <a:solidFill>
-                  <a:srgbClr val="59636E"/>
-                </a:solidFill>
-                <a:latin typeface="Noto Sans KR"/>
-              </a:rPr>
-              <a:t>소비액÷ML 방문 수를 추가 방문 수에 곱한다. 같은 월의 두 증가율은 같으며, 이 비율은 실제 1인당 소비액이 아니다.</a:t>
+              <a:t>소비 목표는 해당 월 ML 소비/방문 비율을 추가 방문 목표에 적용한 계획값. 사례의 소비 증가율·사업 단독 효과가 아님.</a:t>
             </a:r>
           </a:p>
         </p:txBody>
@@ -40742,7 +40720,7 @@
                 <a:latin typeface="Noto Sans KR"/>
                 <a:hlinkClick xmlns:ns32="http://schemas.openxmlformats.org/officeDocument/2006/relationships" ns32:id="rId2"/>
               </a:rPr>
-              <a:t>방문자수/20260820140607__202601-202606_데이터랩_</a:t>
+              <a:t>방문자수/20260820140607__202601-202606_데이터</a:t>
             </a:r>
           </a:p>
           <a:p>
@@ -40765,7 +40743,7 @@
                 <a:latin typeface="Noto Sans KR"/>
                 <a:hlinkClick xmlns:ns33="http://schemas.openxmlformats.org/officeDocument/2006/relationships" ns33:id="rId2"/>
               </a:rPr>
-              <a:t>다운로드.zip 2026-01 ~ 2026-06</a:t>
+              <a:t>랩_다운로드.zip 2026-01 ~ 2026-06</a:t>
             </a:r>
           </a:p>
         </p:txBody>
@@ -40857,7 +40835,7 @@
                 <a:latin typeface="Noto Sans KR"/>
                 <a:hlinkClick xmlns:ns36="http://schemas.openxmlformats.org/officeDocument/2006/relationships" ns36:id="rId2"/>
               </a:rPr>
-              <a:t>이동통신/외국인/20260820141710_전국_202601-202606</a:t>
+              <a:t>이동통신/외국인/20260820141710_전국_202601-202</a:t>
             </a:r>
           </a:p>
           <a:p>
@@ -40880,7 +40858,7 @@
                 <a:latin typeface="Noto Sans KR"/>
                 <a:hlinkClick xmlns:ns37="http://schemas.openxmlformats.org/officeDocument/2006/relationships" ns37:id="rId2"/>
               </a:rPr>
-              <a:t>_데이터랩_다운로드.zip 2026-01 ~ 2026-06</a:t>
+              <a:t>606_데이터랩_다운로드.zip 2026-01 ~ 2026-06</a:t>
             </a:r>
           </a:p>
         </p:txBody>
@@ -40972,7 +40950,7 @@
                 <a:latin typeface="Noto Sans KR"/>
                 <a:hlinkClick xmlns:ns40="http://schemas.openxmlformats.org/officeDocument/2006/relationships" ns40:id="rId2"/>
               </a:rPr>
-              <a:t>관광지출액/20260820140046__202601-202606_데이터랩</a:t>
+              <a:t>관광지출액/20260820140046__202601-202606_데이</a:t>
             </a:r>
           </a:p>
           <a:p>
@@ -40995,7 +40973,7 @@
                 <a:latin typeface="Noto Sans KR"/>
                 <a:hlinkClick xmlns:ns41="http://schemas.openxmlformats.org/officeDocument/2006/relationships" ns41:id="rId2"/>
               </a:rPr>
-              <a:t>_다운로드.zip 2026-01 ~ 2026-06</a:t>
+              <a:t>터랩_다운로드.zip 2026-01 ~ 2026-06</a:t>
             </a:r>
           </a:p>
         </p:txBody>
@@ -41087,7 +41065,7 @@
                 <a:latin typeface="Noto Sans KR"/>
                 <a:hlinkClick xmlns:ns44="http://schemas.openxmlformats.org/officeDocument/2006/relationships" ns44:id="rId2"/>
               </a:rPr>
-              <a:t>관광지출액/20260820140355__202601-202606_데이터랩</a:t>
+              <a:t>관광지출액/20260820140355__202601-202606_데이</a:t>
             </a:r>
           </a:p>
           <a:p>
@@ -41110,7 +41088,7 @@
                 <a:latin typeface="Noto Sans KR"/>
                 <a:hlinkClick xmlns:ns45="http://schemas.openxmlformats.org/officeDocument/2006/relationships" ns45:id="rId2"/>
               </a:rPr>
-              <a:t>_다운로드.zip 2026-01 ~ 2026-06</a:t>
+              <a:t>터랩_다운로드.zip 2026-01 ~ 2026-06</a:t>
             </a:r>
           </a:p>
         </p:txBody>
@@ -41202,7 +41180,7 @@
                 <a:latin typeface="Noto Sans KR"/>
                 <a:hlinkClick xmlns:ns48="http://schemas.openxmlformats.org/officeDocument/2006/relationships" ns48:id="rId2"/>
               </a:rPr>
-              <a:t>검색건수/20260820195507__202601-202606_데이터랩_</a:t>
+              <a:t>검색건수/20260820195507__202601-202606_데이터</a:t>
             </a:r>
           </a:p>
           <a:p>
@@ -41225,7 +41203,7 @@
                 <a:latin typeface="Noto Sans KR"/>
                 <a:hlinkClick xmlns:ns49="http://schemas.openxmlformats.org/officeDocument/2006/relationships" ns49:id="rId2"/>
               </a:rPr>
-              <a:t>다운로드.zip 2026-01 ~ 2026-06</a:t>
+              <a:t>랩_다운로드.zip 2026-01 ~ 2026-06</a:t>
             </a:r>
           </a:p>
         </p:txBody>
@@ -41317,7 +41295,7 @@
                 <a:latin typeface="Noto Sans KR"/>
                 <a:hlinkClick xmlns:ns52="http://schemas.openxmlformats.org/officeDocument/2006/relationships" ns52:id="rId2"/>
               </a:rPr>
-              <a:t>방문자수/20260820140614__202501-202512_데이터랩_</a:t>
+              <a:t>방문자수/20260820140614__202501-202512_데이터</a:t>
             </a:r>
           </a:p>
           <a:p>
@@ -41340,7 +41318,7 @@
                 <a:latin typeface="Noto Sans KR"/>
                 <a:hlinkClick xmlns:ns53="http://schemas.openxmlformats.org/officeDocument/2006/relationships" ns53:id="rId2"/>
               </a:rPr>
-              <a:t>다운로드.zip 2026-01 ~ 2026-06</a:t>
+              <a:t>랩_다운로드.zip 2026-01 ~ 2026-06</a:t>
             </a:r>
           </a:p>
         </p:txBody>
@@ -42445,7 +42423,7 @@
                 <a:latin typeface="Noto Sans KR"/>
                 <a:hlinkClick r:id="rId2"/>
               </a:rPr>
-              <a:t>이동통신/외국인/20260820141649_전국_202501-202512</a:t>
+              <a:t>이동통신/외국인/20260820141649_전국_202501-202</a:t>
             </a:r>
           </a:p>
           <a:p>
@@ -42468,7 +42446,7 @@
                 <a:latin typeface="Noto Sans KR"/>
                 <a:hlinkClick r:id="rId2"/>
               </a:rPr>
-              <a:t>_데이터랩_다운로드.zip 2026-01 ~ 2026-06</a:t>
+              <a:t>512_데이터랩_다운로드.zip 2026-01 ~ 2026-06</a:t>
             </a:r>
           </a:p>
         </p:txBody>
@@ -42560,7 +42538,7 @@
                 <a:latin typeface="Noto Sans KR"/>
                 <a:hlinkClick r:id="rId2"/>
               </a:rPr>
-              <a:t>관광지출액/20260820135957__202501-202512_데이터랩</a:t>
+              <a:t>관광지출액/20260820135957__202501-202512_데이</a:t>
             </a:r>
           </a:p>
           <a:p>
@@ -42583,7 +42561,7 @@
                 <a:latin typeface="Noto Sans KR"/>
                 <a:hlinkClick r:id="rId2"/>
               </a:rPr>
-              <a:t>_다운로드.zip 2026-01 ~ 2026-06</a:t>
+              <a:t>터랩_다운로드.zip 2026-01 ~ 2026-06</a:t>
             </a:r>
           </a:p>
         </p:txBody>
@@ -42675,7 +42653,7 @@
                 <a:latin typeface="Noto Sans KR"/>
                 <a:hlinkClick r:id="rId2"/>
               </a:rPr>
-              <a:t>관광지출액/20260820140409__202501-202512_데이터랩</a:t>
+              <a:t>관광지출액/20260820140409__202501-202512_데이</a:t>
             </a:r>
           </a:p>
           <a:p>
@@ -42698,7 +42676,7 @@
                 <a:latin typeface="Noto Sans KR"/>
                 <a:hlinkClick r:id="rId2"/>
               </a:rPr>
-              <a:t>_다운로드.zip 2026-01 ~ 2026-06</a:t>
+              <a:t>터랩_다운로드.zip 2026-01 ~ 2026-06</a:t>
             </a:r>
           </a:p>
         </p:txBody>
@@ -42790,7 +42768,7 @@
                 <a:latin typeface="Noto Sans KR"/>
                 <a:hlinkClick r:id="rId2"/>
               </a:rPr>
-              <a:t>검색건수/20260820132007__202501-202512_데이터랩_</a:t>
+              <a:t>검색건수/20260820132007__202501-202512_데이터</a:t>
             </a:r>
           </a:p>
           <a:p>
@@ -42813,7 +42791,7 @@
                 <a:latin typeface="Noto Sans KR"/>
                 <a:hlinkClick r:id="rId2"/>
               </a:rPr>
-              <a:t>다운로드.zip 2026-01 ~ 2026-06</a:t>
+              <a:t>랩_다운로드.zip 2026-01 ~ 2026-06</a:t>
             </a:r>
           </a:p>
         </p:txBody>
@@ -42905,7 +42883,7 @@
                 <a:latin typeface="Noto Sans KR"/>
                 <a:hlinkClick r:id="rId2"/>
               </a:rPr>
-              <a:t>방문자수/20260820140624__202401-202412_데이터랩_</a:t>
+              <a:t>방문자수/20260820140624__202401-202412_데이터</a:t>
             </a:r>
           </a:p>
           <a:p>
@@ -42928,7 +42906,7 @@
                 <a:latin typeface="Noto Sans KR"/>
                 <a:hlinkClick r:id="rId2"/>
               </a:rPr>
-              <a:t>다운로드.zip 2026-01 ~ 2026-06</a:t>
+              <a:t>랩_다운로드.zip 2026-01 ~ 2026-06</a:t>
             </a:r>
           </a:p>
         </p:txBody>
@@ -43020,7 +42998,7 @@
                 <a:latin typeface="Noto Sans KR"/>
                 <a:hlinkClick r:id="rId2"/>
               </a:rPr>
-              <a:t>이동통신/외국인/20260820141639_전국_202401-202412</a:t>
+              <a:t>이동통신/외국인/20260820141639_전국_202401-202</a:t>
             </a:r>
           </a:p>
           <a:p>
@@ -43043,7 +43021,7 @@
                 <a:latin typeface="Noto Sans KR"/>
                 <a:hlinkClick r:id="rId2"/>
               </a:rPr>
-              <a:t>_데이터랩_다운로드.zip 2026-01 ~ 2026-06</a:t>
+              <a:t>412_데이터랩_다운로드.zip 2026-01 ~ 2026-06</a:t>
             </a:r>
           </a:p>
         </p:txBody>
@@ -43089,7 +43067,7 @@
                 <a:latin typeface="Noto Sans KR"/>
                 <a:hlinkClick r:id="rId2"/>
               </a:rPr>
-              <a:t>관측 데이터 D26 한국관광 데이터랩 지역별 관광 현황 · ·</a:t>
+              <a:t>관측 데이터 D26 한국관광 데이터랩 지역별 관광 현황</a:t>
             </a:r>
           </a:p>
           <a:p>
@@ -43112,7 +43090,7 @@
                 <a:latin typeface="Noto Sans KR"/>
                 <a:hlinkClick r:id="rId2"/>
               </a:rPr>
-              <a:t>인기관광지 2025-07 ~ 2026-06</a:t>
+              <a:t>· · 인기관광지 2025-07 ~ 2026-06</a:t>
             </a:r>
           </a:p>
         </p:txBody>
@@ -43158,7 +43136,7 @@
                 <a:latin typeface="Noto Sans KR"/>
                 <a:hlinkClick r:id="rId2"/>
               </a:rPr>
-              <a:t>관측 데이터 D27 한국관광 데이터랩 지역별 관광 현황 · ·</a:t>
+              <a:t>관측 데이터 D27 한국관광 데이터랩 지역별 관광 현황</a:t>
             </a:r>
           </a:p>
           <a:p>
@@ -43181,7 +43159,7 @@
                 <a:latin typeface="Noto Sans KR"/>
                 <a:hlinkClick r:id="rId2"/>
               </a:rPr>
-              <a:t>유입유출 2025-07 ~ 2026-06</a:t>
+              <a:t>· · 유입유출 2025-07 ~ 2026-06</a:t>
             </a:r>
           </a:p>
         </p:txBody>
@@ -43227,7 +43205,7 @@
                 <a:latin typeface="Noto Sans KR"/>
                 <a:hlinkClick r:id="rId2"/>
               </a:rPr>
-              <a:t>관측 데이터 D28 한국관광 데이터랩 지역별 관광 현황 · ·</a:t>
+              <a:t>관측 데이터 D28 한국관광 데이터랩 지역별 관광 현황</a:t>
             </a:r>
           </a:p>
           <a:p>
@@ -43250,7 +43228,7 @@
                 <a:latin typeface="Noto Sans KR"/>
                 <a:hlinkClick r:id="rId2"/>
               </a:rPr>
-              <a:t>지역집중률 2025-07 ~ 2026-06</a:t>
+              <a:t>· · 지역집중률 2025-07 ~ 2026-06</a:t>
             </a:r>
           </a:p>
         </p:txBody>
@@ -43295,7 +43273,7 @@
                 </a:solidFill>
                 <a:latin typeface="Noto Sans KR"/>
               </a:rPr>
-              <a:t>머신러닝 예측치 방문자 수 RandomForestRegressor</a:t>
+              <a:t>머신러닝 예측치 방문자 수</a:t>
             </a:r>
           </a:p>
           <a:p>
@@ -43317,7 +43295,7 @@
                 </a:solidFill>
                 <a:latin typeface="Noto Sans KR"/>
               </a:rPr>
-              <a:t>최종 월 6,585,928명</a:t>
+              <a:t>RandomForestRegressor 최종 월 6,585,928명</a:t>
             </a:r>
           </a:p>
         </p:txBody>
@@ -43765,7 +43743,7 @@
                 <a:latin typeface="Noto Sans KR"/>
                 <a:hlinkClick r:id="rId3"/>
               </a:rPr>
-              <a:t>공식 사례·문서 D50 요즘, 한국관광 2호 - 지방공항 연계</a:t>
+              <a:t>공식 사례·문서 D50 요즘, 한국관광 2호 - 지방공항</a:t>
             </a:r>
           </a:p>
           <a:p>
@@ -43788,7 +43766,7 @@
                 <a:latin typeface="Noto Sans KR"/>
                 <a:hlinkClick r:id="rId3"/>
               </a:rPr>
-              <a:t>지역관광 활성화 방안 · PDF 44쪽 외 8쪽 (9개</a:t>
+              <a:t>연계 지역관광 활성화 방안 · PDF 44쪽 외 8쪽 (9개</a:t>
             </a:r>
           </a:p>
           <a:p>
@@ -43972,7 +43950,7 @@
                 <a:latin typeface="Noto Sans KR"/>
                 <a:hlinkClick r:id="rId5"/>
               </a:rPr>
-              <a:t>서울국제정원박람회 성수 상권 매출 30% 급증 &gt; 보도자료</a:t>
+              <a:t>서울국제정원박람회 성수 상권 매출 30% 급증 &gt;</a:t>
             </a:r>
           </a:p>
           <a:p>
@@ -43995,7 +43973,7 @@
                 <a:latin typeface="Noto Sans KR"/>
                 <a:hlinkClick r:id="rId5"/>
               </a:rPr>
-              <a:t>| 서울특별시 www.seoul.go.kr</a:t>
+              <a:t>보도자료 | 서울특별시 www.seoul.go.kr</a:t>
             </a:r>
           </a:p>
         </p:txBody>
@@ -44435,7 +44413,7 @@
           <a:p>
             <a:pPr eaLnBrk="0">
               <a:lnSpc>
-                <a:spcPts val="1687"/>
+                <a:spcPts val="1593"/>
               </a:lnSpc>
               <a:spcBef>
                 <a:spcPts val="0"/>
@@ -44445,7 +44423,7 @@
               </a:spcAft>
             </a:pPr>
             <a:r>
-              <a:rPr sz="1350" b="0" u="none">
+              <a:rPr sz="1275" b="0" u="none">
                 <a:solidFill>
                   <a:srgbClr val="004EA2"/>
                 </a:solidFill>
@@ -44458,7 +44436,7 @@
           <a:p>
             <a:pPr eaLnBrk="0">
               <a:lnSpc>
-                <a:spcPts val="1687"/>
+                <a:spcPts val="1593"/>
               </a:lnSpc>
               <a:spcBef>
                 <a:spcPts val="0"/>
@@ -44468,7 +44446,7 @@
               </a:spcAft>
             </a:pPr>
             <a:r>
-              <a:rPr sz="1350" b="0" u="none">
+              <a:rPr sz="1275" b="0" u="none">
                 <a:solidFill>
                   <a:srgbClr val="004EA2"/>
                 </a:solidFill>
@@ -44889,7 +44867,7 @@
                 <a:latin typeface="Noto Sans KR"/>
                 <a:hlinkClick r:id="rId10"/>
               </a:rPr>
-              <a:t>공식 사례·문서 D62 2025 대한민국 밤밤페스타 개최 도시</a:t>
+              <a:t>공식 사례·문서 D62 2025 대한민국 밤밤페스타 개최</a:t>
             </a:r>
           </a:p>
           <a:p>
@@ -44912,7 +44890,7 @@
                 <a:latin typeface="Noto Sans KR"/>
                 <a:hlinkClick r:id="rId10"/>
               </a:rPr>
-              <a:t>및 일정 korean.visitkorea.or.kr</a:t>
+              <a:t>도시 및 일정 korean.visitkorea.or.kr</a:t>
             </a:r>
           </a:p>
         </p:txBody>
@@ -46358,7 +46336,29 @@
                           </a:solidFill>
                           <a:latin typeface="Noto Sans KR"/>
                         </a:rPr>
-                        <a:t>선택 지역의 소비·체류</a:t>
+                        <a:t>선택 지역의</a:t>
+                      </a:r>
+                    </a:p>
+                    <a:p>
+                      <a:pPr eaLnBrk="0">
+                        <a:lnSpc>
+                          <a:spcPct val="112000"/>
+                        </a:lnSpc>
+                        <a:spcBef>
+                          <a:spcPts val="0"/>
+                        </a:spcBef>
+                        <a:spcAft>
+                          <a:spcPts val="0"/>
+                        </a:spcAft>
+                      </a:pPr>
+                      <a:r>
+                        <a:rPr sz="1575" b="1">
+                          <a:solidFill>
+                            <a:srgbClr val="1D2227"/>
+                          </a:solidFill>
+                          <a:latin typeface="Noto Sans KR"/>
+                        </a:rPr>
+                        <a:t>소비·체류</a:t>
                       </a:r>
                     </a:p>
                   </a:txBody>
@@ -46446,7 +46446,7 @@
                           </a:solidFill>
                           <a:latin typeface="Noto Sans KR"/>
                         </a:rPr>
-                        <a:t>지역 자료는 참여 업종·대상 범위를 정하는 입력. 다른 지역과</a:t>
+                        <a:t>지역 소비·체류 지표를 보고 참여 업종과 이용</a:t>
                       </a:r>
                     </a:p>
                     <a:p>
@@ -46468,7 +46468,7 @@
                           </a:solidFill>
                           <a:latin typeface="Noto Sans KR"/>
                         </a:rPr>
-                        <a:t>수치가 같다는 증거로 사용하지 않음</a:t>
+                        <a:t>대상을 정합니다.</a:t>
                       </a:r>
                     </a:p>
                   </a:txBody>
@@ -46536,7 +46536,7 @@
                           </a:solidFill>
                           <a:latin typeface="Noto Sans KR"/>
                         </a:rPr>
-                        <a:t>사업기간 추가 방문 목표 2,635,826명 × 시범 담당 비중 1% →</a:t>
+                        <a:t>추가 방문 목표 2,635,826명 × 1%</a:t>
                       </a:r>
                     </a:p>
                     <a:p>
@@ -46558,29 +46558,7 @@
                           </a:solidFill>
                           <a:latin typeface="Noto Sans KR"/>
                         </a:rPr>
-                        <a:t>26,359건(올림). 1%는 직접 운영할 참여량 배분 가정이며</a:t>
-                      </a:r>
-                    </a:p>
-                    <a:p>
-                      <a:pPr eaLnBrk="0">
-                        <a:lnSpc>
-                          <a:spcPct val="112000"/>
-                        </a:lnSpc>
-                        <a:spcBef>
-                          <a:spcPts val="0"/>
-                        </a:spcBef>
-                        <a:spcAft>
-                          <a:spcPts val="0"/>
-                        </a:spcAft>
-                      </a:pPr>
-                      <a:r>
-                        <a:rPr sz="1575" b="0">
-                          <a:solidFill>
-                            <a:srgbClr val="1D2227"/>
-                          </a:solidFill>
-                          <a:latin typeface="Noto Sans KR"/>
-                        </a:rPr>
-                        <a:t>전환율 예측이 아닙니다.</a:t>
+                        <a:t>시범 참여 26,359건(올림·계획 가정)</a:t>
                       </a:r>
                     </a:p>
                   </a:txBody>
@@ -46613,29 +46591,7 @@
                           </a:solidFill>
                           <a:latin typeface="Noto Sans KR"/>
                         </a:rPr>
-                        <a:t>추가 방문 목표의 일부를 직접 운영할 참여량으로 정하고 건별</a:t>
-                      </a:r>
-                    </a:p>
-                    <a:p>
-                      <a:pPr eaLnBrk="0">
-                        <a:lnSpc>
-                          <a:spcPct val="112000"/>
-                        </a:lnSpc>
-                        <a:spcBef>
-                          <a:spcPts val="0"/>
-                        </a:spcBef>
-                        <a:spcAft>
-                          <a:spcPts val="0"/>
-                        </a:spcAft>
-                      </a:pPr>
-                      <a:r>
-                        <a:rPr sz="1575" b="0">
-                          <a:solidFill>
-                            <a:srgbClr val="1D2227"/>
-                          </a:solidFill>
-                          <a:latin typeface="Noto Sans KR"/>
-                        </a:rPr>
-                        <a:t>혜택·운영 인일로 예산 계산</a:t>
+                        <a:t>참여량 × 건별 혜택과 운영 인일로 견적을 계산합니다.</a:t>
                       </a:r>
                     </a:p>
                   </a:txBody>
@@ -46778,7 +46734,7 @@
                 </a:solidFill>
                 <a:latin typeface="Noto Sans KR"/>
               </a:rPr>
-              <a:t>성동구를 방문한 외지인 관광객이 지정된 지역 내 상점에서 일정 금액 이상 소비 시, 소비액의 일부를 성동구</a:t>
+              <a:t>성동구를 방문한 외지인 관광객이 지정된 지역 내 상점에서 일정 금액 이상 소비 시, 소비액의 일부를</a:t>
             </a:r>
           </a:p>
           <a:p>
@@ -46800,7 +46756,29 @@
                 </a:solidFill>
                 <a:latin typeface="Noto Sans KR"/>
               </a:rPr>
-              <a:t>지역상품권으로 즉시 또는 사후 환급하여 해당 상품권이 다시 성동구 내에서 사용되도록 선순환 구조를 구축함.</a:t>
+              <a:t>성동구 지역상품권으로 즉시 또는 사후 환급하여 해당 상품권이 다시 성동구 내에서</a:t>
+            </a:r>
+          </a:p>
+          <a:p>
+            <a:pPr eaLnBrk="0">
+              <a:lnSpc>
+                <a:spcPts val="1968"/>
+              </a:lnSpc>
+              <a:spcBef>
+                <a:spcPts val="0"/>
+              </a:spcBef>
+              <a:spcAft>
+                <a:spcPts val="0"/>
+              </a:spcAft>
+            </a:pPr>
+            <a:r>
+              <a:rPr sz="1575" b="0">
+                <a:solidFill>
+                  <a:srgbClr val="1D2227"/>
+                </a:solidFill>
+                <a:latin typeface="Noto Sans KR"/>
+              </a:rPr>
+              <a:t>사용되도록 선순환 구조를 구축함.</a:t>
             </a:r>
           </a:p>
         </p:txBody>
@@ -48472,7 +48450,7 @@
                 </a:solidFill>
                 <a:latin typeface="Noto Sans KR"/>
               </a:rPr>
-              <a:t>성동구를 방문한 외지인 관광객이 지정된 지역 내 상점에서 일정</a:t>
+              <a:t>성동구를 방문한 외지인 관광객이 지정된 지역 내 상점에서</a:t>
             </a:r>
           </a:p>
           <a:p>
@@ -48494,7 +48472,7 @@
                 </a:solidFill>
                 <a:latin typeface="Noto Sans KR"/>
               </a:rPr>
-              <a:t>금액 이상 소비 시, 소비액의 일부를 성동구 지역상품권으로 즉시</a:t>
+              <a:t>일정 금액 이상 소비 시, 소비액의 일부를 성동구</a:t>
             </a:r>
           </a:p>
           <a:p>
@@ -48516,7 +48494,7 @@
                 </a:solidFill>
                 <a:latin typeface="Noto Sans KR"/>
               </a:rPr>
-              <a:t>또는 사후 환급하여 해당 상품권이 다시 성동구 내에서</a:t>
+              <a:t>지역상품권으로 즉시 또는 사후 환급하여 해당 상품권이 다시</a:t>
             </a:r>
           </a:p>
           <a:p>
@@ -48538,7 +48516,7 @@
                 </a:solidFill>
                 <a:latin typeface="Noto Sans KR"/>
               </a:rPr>
-              <a:t>사용되도록 선순환 구조를 구축함.</a:t>
+              <a:t>성동구 내에서 사용되도록 선순환 구조를 구축함.</a:t>
             </a:r>
           </a:p>
         </p:txBody>
@@ -48716,7 +48694,7 @@
                 </a:solidFill>
                 <a:latin typeface="Noto Sans KR"/>
               </a:rPr>
-              <a:t>지역상품권 사용처와 관광업체 참여 기준, 여행 지출 증빙과 중복수혜 방지 절차,</a:t>
+              <a:t>지역상품권 사용처와 관광업체 참여 기준, 여행 지출 증빙과 중복수혜 방지</a:t>
             </a:r>
           </a:p>
           <a:p>
@@ -48738,7 +48716,7 @@
                 </a:solidFill>
                 <a:latin typeface="Noto Sans KR"/>
               </a:rPr>
-              <a:t>지원금보다 추가 지역소비가 큰지 사후 측정 필요.</a:t>
+              <a:t>절차, 지원금보다 추가 지역소비가 큰지 사후 측정 필요.</a:t>
             </a:r>
           </a:p>
         </p:txBody>
@@ -49075,7 +49053,7 @@
                 </a:solidFill>
                 <a:latin typeface="Noto Sans KR"/>
               </a:rPr>
-              <a:t>성동구 지역상품권으로 즉시 또는 사후 환급하여 해당</a:t>
+              <a:t>성동구 지역상품권으로 즉시 또는 사후 환급하여</a:t>
             </a:r>
           </a:p>
           <a:p>
@@ -49097,7 +49075,7 @@
                 </a:solidFill>
                 <a:latin typeface="Noto Sans KR"/>
               </a:rPr>
-              <a:t>상품권이 다시 성동구 내에서 사용되도록</a:t>
+              <a:t>해당 상품권이 다시 성동구 내에서 사용되도록</a:t>
             </a:r>
           </a:p>
           <a:p>
@@ -50575,7 +50553,7 @@
                 </a:solidFill>
                 <a:latin typeface="Noto Sans KR"/>
               </a:rPr>
-              <a:t>여행자가 지역에서 지출한 비용의 일부를</a:t>
+              <a:t>여행자가 지역에서 지출한 비용의</a:t>
             </a:r>
           </a:p>
           <a:p>
@@ -50597,7 +50575,7 @@
                 </a:solidFill>
                 <a:latin typeface="Noto Sans KR"/>
               </a:rPr>
-              <a:t>지역상품권으로 돌려받게 하여 혜택이</a:t>
+              <a:t>일부를 지역상품권으로 돌려받게 하여</a:t>
             </a:r>
           </a:p>
           <a:p>
@@ -50619,7 +50597,29 @@
                 </a:solidFill>
                 <a:latin typeface="Noto Sans KR"/>
               </a:rPr>
-              <a:t>다시 지역 상점에서 사용되도록 설계</a:t>
+              <a:t>혜택이 다시 지역 상점에서</a:t>
+            </a:r>
+          </a:p>
+          <a:p>
+            <a:pPr eaLnBrk="0">
+              <a:lnSpc>
+                <a:spcPts val="1968"/>
+              </a:lnSpc>
+              <a:spcBef>
+                <a:spcPts val="0"/>
+              </a:spcBef>
+              <a:spcAft>
+                <a:spcPts val="0"/>
+              </a:spcAft>
+            </a:pPr>
+            <a:r>
+              <a:rPr sz="1575" b="0">
+                <a:solidFill>
+                  <a:srgbClr val="59636E"/>
+                </a:solidFill>
+                <a:latin typeface="Noto Sans KR"/>
+              </a:rPr>
+              <a:t>사용되도록 설계</a:t>
             </a:r>
           </a:p>
         </p:txBody>
@@ -50936,7 +50936,7 @@
                 </a:solidFill>
                 <a:latin typeface="Noto Sans KR"/>
               </a:rPr>
-              <a:t>전국 인구감소지역 34곳 · 디지털</a:t>
+              <a:t>전국 인구감소지역 34곳 ·</a:t>
             </a:r>
           </a:p>
           <a:p>
@@ -50958,7 +50958,7 @@
                 </a:solidFill>
                 <a:latin typeface="Noto Sans KR"/>
               </a:rPr>
-              <a:t>관광주민증과 교통·숙박·상점</a:t>
+              <a:t>디지털 관광주민증과</a:t>
             </a:r>
           </a:p>
           <a:p>
@@ -50980,7 +50980,7 @@
                 </a:solidFill>
                 <a:latin typeface="Noto Sans KR"/>
               </a:rPr>
-              <a:t>할인 결합</a:t>
+              <a:t>교통·숙박·상점 할인 결합</a:t>
             </a:r>
           </a:p>
         </p:txBody>
@@ -51025,7 +51025,7 @@
                 </a:solidFill>
                 <a:latin typeface="Noto Sans KR"/>
               </a:rPr>
-              <a:t>디지털 관광주민증 참여업체 현장 인증과</a:t>
+              <a:t>디지털 관광주민증 참여업체 현장</a:t>
             </a:r>
           </a:p>
           <a:p>
@@ -51047,7 +51047,7 @@
                 </a:solidFill>
                 <a:latin typeface="Noto Sans KR"/>
               </a:rPr>
-              <a:t>숙박·식음·관람·체험 할인, 특정 시간대</a:t>
+              <a:t>인증과 숙박·식음·관람·체험 할인,</a:t>
             </a:r>
           </a:p>
           <a:p>
@@ -51069,7 +51069,29 @@
                 </a:solidFill>
                 <a:latin typeface="Noto Sans KR"/>
               </a:rPr>
-              <a:t>KTX 할인과 방문 후 교통 할인권을 결합</a:t>
+              <a:t>특정 시간대 KTX 할인과 방문 후 교통</a:t>
+            </a:r>
+          </a:p>
+          <a:p>
+            <a:pPr eaLnBrk="0">
+              <a:lnSpc>
+                <a:spcPts val="1968"/>
+              </a:lnSpc>
+              <a:spcBef>
+                <a:spcPts val="0"/>
+              </a:spcBef>
+              <a:spcAft>
+                <a:spcPts val="0"/>
+              </a:spcAft>
+            </a:pPr>
+            <a:r>
+              <a:rPr sz="1575" b="0">
+                <a:solidFill>
+                  <a:srgbClr val="59636E"/>
+                </a:solidFill>
+                <a:latin typeface="Noto Sans KR"/>
+              </a:rPr>
+              <a:t>할인권을 결합</a:t>
             </a:r>
           </a:p>
         </p:txBody>
@@ -51453,7 +51475,7 @@
                 </a:solidFill>
                 <a:latin typeface="Noto Sans KR"/>
               </a:rPr>
-              <a:t>온라인 여행사 예약 단계에서 할인쿠폰을</a:t>
+              <a:t>온라인 여행사 예약 단계에서</a:t>
             </a:r>
           </a:p>
           <a:p>
@@ -51475,7 +51497,7 @@
                 </a:solidFill>
                 <a:latin typeface="Noto Sans KR"/>
               </a:rPr>
-              <a:t>제공하고, 지역 숙소에서 사용할 수</a:t>
+              <a:t>할인쿠폰을 제공하고, 지역 숙소에서</a:t>
             </a:r>
           </a:p>
           <a:p>
@@ -51497,7 +51519,29 @@
                 </a:solidFill>
                 <a:latin typeface="Noto Sans KR"/>
               </a:rPr>
-              <a:t>있도록 참여 채널과 기간을 통합 운영</a:t>
+              <a:t>사용할 수 있도록 참여 채널과</a:t>
+            </a:r>
+          </a:p>
+          <a:p>
+            <a:pPr eaLnBrk="0">
+              <a:lnSpc>
+                <a:spcPts val="1968"/>
+              </a:lnSpc>
+              <a:spcBef>
+                <a:spcPts val="0"/>
+              </a:spcBef>
+              <a:spcAft>
+                <a:spcPts val="0"/>
+              </a:spcAft>
+            </a:pPr>
+            <a:r>
+              <a:rPr sz="1575" b="0">
+                <a:solidFill>
+                  <a:srgbClr val="59636E"/>
+                </a:solidFill>
+                <a:latin typeface="Noto Sans KR"/>
+              </a:rPr>
+              <a:t>기간을 통합 운영</a:t>
             </a:r>
           </a:p>
         </p:txBody>
@@ -52021,7 +52065,7 @@
                 </a:solidFill>
                 <a:latin typeface="Noto Sans KR"/>
               </a:rPr>
-              <a:t>참여를 희망하는 가게에 사용 가능한 상품권과 정산 방법을 확인합니다. 지원 대상, 인정할 지출, 신청 마감일과</a:t>
+              <a:t>참여를 희망하는 가게에 사용 가능한 상품권과 정산 방법을 확인합니다. 지원 대상, 인정할 지출, 신청</a:t>
             </a:r>
           </a:p>
           <a:p>
@@ -52043,7 +52087,7 @@
                 </a:solidFill>
                 <a:latin typeface="Noto Sans KR"/>
               </a:rPr>
-              <a:t>1인당 한도를 정해 같은 안내문을 배포합니다.</a:t>
+              <a:t>마감일과 1인당 한도를 정해 같은 안내문을 배포합니다.</a:t>
             </a:r>
           </a:p>
         </p:txBody>
@@ -52601,7 +52645,7 @@
                 </a:solidFill>
                 <a:latin typeface="Noto Sans KR"/>
               </a:rPr>
-              <a:t>참여 가게를 한정해 먼저 운영합니다. 담당자가 지출 증빙을 확인한 뒤 정해진 기준에 따라 환급하고, 신청자에게</a:t>
+              <a:t>참여 가게를 한정해 먼저 운영합니다. 담당자가 지출 증빙을 확인한 뒤 정해진 기준에 따라 환급하고,</a:t>
             </a:r>
           </a:p>
           <a:p>
@@ -52623,7 +52667,7 @@
                 </a:solidFill>
                 <a:latin typeface="Noto Sans KR"/>
               </a:rPr>
-              <a:t>지급일과 상품권 사용 방법을 알려줍니다.</a:t>
+              <a:t>신청자에게 지급일과 상품권 사용 방법을 알려줍니다.</a:t>
             </a:r>
           </a:p>
         </p:txBody>
@@ -52785,7 +52829,7 @@
           <a:p>
             <a:pPr eaLnBrk="0">
               <a:lnSpc>
-                <a:spcPts val="1687"/>
+                <a:spcPts val="1546"/>
               </a:lnSpc>
               <a:spcBef>
                 <a:spcPts val="0"/>
@@ -52795,7 +52839,7 @@
               </a:spcAft>
             </a:pPr>
             <a:r>
-              <a:rPr sz="1350" b="0">
+              <a:rPr sz="1237" b="0">
                 <a:solidFill>
                   <a:srgbClr val="59636E"/>
                 </a:solidFill>
@@ -53400,9 +53444,9 @@
                         </a:spcAft>
                       </a:pPr>
                       <a:r>
-                        <a:rPr sz="1537" b="0">
+                        <a:rPr sz="1537" b="1">
                           <a:solidFill>
-                            <a:srgbClr val="1D2227"/>
+                            <a:srgbClr val="FF6B00"/>
                           </a:solidFill>
                           <a:latin typeface="Noto Sans KR"/>
                         </a:rPr>
@@ -53534,9 +53578,9 @@
                         </a:spcAft>
                       </a:pPr>
                       <a:r>
-                        <a:rPr sz="1537" b="0">
+                        <a:rPr sz="1537" b="1">
                           <a:solidFill>
-                            <a:srgbClr val="1D2227"/>
+                            <a:srgbClr val="FF6B00"/>
                           </a:solidFill>
                           <a:latin typeface="Noto Sans KR"/>
                         </a:rPr>
@@ -53668,9 +53712,9 @@
                         </a:spcAft>
                       </a:pPr>
                       <a:r>
-                        <a:rPr sz="1537" b="0">
+                        <a:rPr sz="1537" b="1">
                           <a:solidFill>
-                            <a:srgbClr val="1D2227"/>
+                            <a:srgbClr val="FF6B00"/>
                           </a:solidFill>
                           <a:latin typeface="Noto Sans KR"/>
                         </a:rPr>
@@ -53802,9 +53846,9 @@
                         </a:spcAft>
                       </a:pPr>
                       <a:r>
-                        <a:rPr sz="1537" b="0">
+                        <a:rPr sz="1537" b="1">
                           <a:solidFill>
-                            <a:srgbClr val="1D2227"/>
+                            <a:srgbClr val="FF6B00"/>
                           </a:solidFill>
                           <a:latin typeface="Noto Sans KR"/>
                         </a:rPr>
@@ -54188,9 +54232,9 @@
                         </a:spcAft>
                       </a:pPr>
                       <a:r>
-                        <a:rPr sz="1537" b="0">
+                        <a:rPr sz="1537" b="1">
                           <a:solidFill>
-                            <a:srgbClr val="1D2227"/>
+                            <a:srgbClr val="FF6B00"/>
                           </a:solidFill>
                           <a:latin typeface="Noto Sans KR"/>
                         </a:rPr>
@@ -54322,9 +54366,9 @@
                         </a:spcAft>
                       </a:pPr>
                       <a:r>
-                        <a:rPr sz="1537" b="0">
+                        <a:rPr sz="1537" b="1">
                           <a:solidFill>
-                            <a:srgbClr val="1D2227"/>
+                            <a:srgbClr val="FF6B00"/>
                           </a:solidFill>
                           <a:latin typeface="Noto Sans KR"/>
                         </a:rPr>
@@ -54456,9 +54500,9 @@
                         </a:spcAft>
                       </a:pPr>
                       <a:r>
-                        <a:rPr sz="1537" b="0">
+                        <a:rPr sz="1537" b="1">
                           <a:solidFill>
-                            <a:srgbClr val="1D2227"/>
+                            <a:srgbClr val="FF6B00"/>
                           </a:solidFill>
                           <a:latin typeface="Noto Sans KR"/>
                         </a:rPr>
@@ -54590,9 +54634,9 @@
                         </a:spcAft>
                       </a:pPr>
                       <a:r>
-                        <a:rPr sz="1537" b="0">
+                        <a:rPr sz="1537" b="1">
                           <a:solidFill>
-                            <a:srgbClr val="1D2227"/>
+                            <a:srgbClr val="FF6B00"/>
                           </a:solidFill>
                           <a:latin typeface="Noto Sans KR"/>
                         </a:rPr>
